--- a/publish/out/next-gen-ai-compiler-survey.pptx
+++ b/publish/out/next-gen-ai-compiler-survey.pptx
@@ -20,6 +20,7 @@
     <p:sldId id="268" r:id="rId19"/>
     <p:sldId id="269" r:id="rId20"/>
     <p:sldId id="270" r:id="rId21"/>
+    <p:sldId id="271" r:id="rId22"/>
   </p:sldIdLst>
   <p:sldSz cx="12191695" cy="6858000" type="screen4x3"/>
   <p:notesSz cx="6858000" cy="9144000"/>
@@ -4984,7 +4985,7 @@
                 </a:solidFill>
                 <a:latin typeface="Inter"/>
               </a:rPr>
-              <a:t>10 / 15</a:t>
+              <a:t>10 / 16</a:t>
             </a:r>
           </a:p>
         </p:txBody>
@@ -5673,7 +5674,7 @@
                 </a:solidFill>
                 <a:latin typeface="Inter"/>
               </a:rPr>
-              <a:t>11 / 15</a:t>
+              <a:t>11 / 16</a:t>
             </a:r>
           </a:p>
         </p:txBody>
@@ -6093,7 +6094,7 @@
                 </a:solidFill>
                 <a:latin typeface="Inter"/>
               </a:rPr>
-              <a:t>12 / 15</a:t>
+              <a:t>12 / 16</a:t>
             </a:r>
           </a:p>
         </p:txBody>
@@ -6463,7 +6464,7 @@
                 </a:solidFill>
                 <a:latin typeface="Inter"/>
               </a:rPr>
-              <a:t>13 / 15</a:t>
+              <a:t>13 / 16</a:t>
             </a:r>
           </a:p>
         </p:txBody>
@@ -6537,7 +6538,7 @@
         </p:nvSpPr>
         <p:spPr>
           <a:xfrm>
-            <a:off x="640080" y="365760"/>
+            <a:off x="640080" y="320040"/>
             <a:ext cx="3657600" cy="274320"/>
           </a:xfrm>
           <a:prstGeom prst="rect">
@@ -6559,7 +6560,7 @@
                 </a:solidFill>
                 <a:latin typeface="Inter"/>
               </a:rPr>
-              <a:t>13  —  IF YOU ADOPT THIS</a:t>
+              <a:t>13  —  COMMERCIALIZATION §5.7</a:t>
             </a:r>
           </a:p>
         </p:txBody>
@@ -6572,8 +6573,8 @@
         </p:nvSpPr>
         <p:spPr>
           <a:xfrm>
-            <a:off x="640080" y="777240"/>
-            <a:ext cx="10972800" cy="502920"/>
+            <a:off x="640080" y="685800"/>
+            <a:ext cx="10972800" cy="457200"/>
           </a:xfrm>
           <a:prstGeom prst="rect">
             <a:avLst/>
@@ -6594,21 +6595,111 @@
                 </a:solidFill>
                 <a:latin typeface="Noto Serif"/>
               </a:rPr>
-              <a:t>Questions before tools.</a:t>
-            </a:r>
-          </a:p>
-        </p:txBody>
-      </p:sp>
-      <p:sp>
-        <p:nvSpPr>
-          <p:cNvPr id="5" name="TextBox 4"/>
-          <p:cNvSpPr txBox="1"/>
-          <p:nvPr/>
-        </p:nvSpPr>
-        <p:spPr>
-          <a:xfrm>
-            <a:off x="640080" y="1554480"/>
-            <a:ext cx="914400" cy="457200"/>
+              <a:t>Ship the hybrid — solve P1–P23.</a:t>
+            </a:r>
+          </a:p>
+        </p:txBody>
+      </p:sp>
+      <p:sp>
+        <p:nvSpPr>
+          <p:cNvPr id="5" name="Rounded Rectangle 4"/>
+          <p:cNvSpPr/>
+          <p:nvPr/>
+        </p:nvSpPr>
+        <p:spPr>
+          <a:xfrm>
+            <a:off x="457200" y="1417320"/>
+            <a:ext cx="3566160" cy="2926080"/>
+          </a:xfrm>
+          <a:prstGeom prst="roundRect">
+            <a:avLst>
+              <a:gd name="adj" fmla="val 8000"/>
+            </a:avLst>
+          </a:prstGeom>
+          <a:solidFill>
+            <a:srgbClr val="FFFFFF"/>
+          </a:solidFill>
+          <a:ln>
+            <a:solidFill>
+              <a:srgbClr val="D9D4CC"/>
+            </a:solidFill>
+          </a:ln>
+        </p:spPr>
+        <p:style>
+          <a:lnRef idx="1">
+            <a:schemeClr val="accent1"/>
+          </a:lnRef>
+          <a:fillRef idx="3">
+            <a:schemeClr val="accent1"/>
+          </a:fillRef>
+          <a:effectRef idx="2">
+            <a:schemeClr val="accent1"/>
+          </a:effectRef>
+          <a:fontRef idx="minor">
+            <a:schemeClr val="lt1"/>
+          </a:fontRef>
+        </p:style>
+        <p:txBody>
+          <a:bodyPr rtlCol="0" anchor="ctr"/>
+          <a:lstStyle/>
+          <a:p>
+            <a:pPr algn="ctr"/>
+          </a:p>
+        </p:txBody>
+      </p:sp>
+      <p:sp>
+        <p:nvSpPr>
+          <p:cNvPr id="6" name="Rectangle 5"/>
+          <p:cNvSpPr/>
+          <p:nvPr/>
+        </p:nvSpPr>
+        <p:spPr>
+          <a:xfrm>
+            <a:off x="457200" y="1417320"/>
+            <a:ext cx="3566160" cy="109728"/>
+          </a:xfrm>
+          <a:prstGeom prst="rect">
+            <a:avLst/>
+          </a:prstGeom>
+          <a:solidFill>
+            <a:srgbClr val="1F5C56"/>
+          </a:solidFill>
+          <a:ln>
+            <a:noFill/>
+          </a:ln>
+        </p:spPr>
+        <p:style>
+          <a:lnRef idx="1">
+            <a:schemeClr val="accent1"/>
+          </a:lnRef>
+          <a:fillRef idx="3">
+            <a:schemeClr val="accent1"/>
+          </a:fillRef>
+          <a:effectRef idx="2">
+            <a:schemeClr val="accent1"/>
+          </a:effectRef>
+          <a:fontRef idx="minor">
+            <a:schemeClr val="lt1"/>
+          </a:fontRef>
+        </p:style>
+        <p:txBody>
+          <a:bodyPr rtlCol="0" anchor="ctr"/>
+          <a:lstStyle/>
+          <a:p>
+            <a:pPr algn="ctr"/>
+          </a:p>
+        </p:txBody>
+      </p:sp>
+      <p:sp>
+        <p:nvSpPr>
+          <p:cNvPr id="7" name="TextBox 6"/>
+          <p:cNvSpPr txBox="1"/>
+          <p:nvPr/>
+        </p:nvSpPr>
+        <p:spPr>
+          <a:xfrm>
+            <a:off x="685800" y="1737360"/>
+            <a:ext cx="3108960" cy="411480"/>
           </a:xfrm>
           <a:prstGeom prst="rect">
             <a:avLst/>
@@ -6623,27 +6714,605 @@
           <a:p>
             <a:pPr algn="l"/>
             <a:r>
-              <a:rPr sz="2000" b="1">
+              <a:rPr sz="1800" b="1">
+                <a:solidFill>
+                  <a:srgbClr val="12161C"/>
+                </a:solidFill>
+                <a:latin typeface="Noto Serif"/>
+              </a:rPr>
+              <a:t>Architecture</a:t>
+            </a:r>
+          </a:p>
+        </p:txBody>
+      </p:sp>
+      <p:sp>
+        <p:nvSpPr>
+          <p:cNvPr id="8" name="TextBox 7"/>
+          <p:cNvSpPr txBox="1"/>
+          <p:nvPr/>
+        </p:nvSpPr>
+        <p:spPr>
+          <a:xfrm>
+            <a:off x="685800" y="2286000"/>
+            <a:ext cx="3108960" cy="1828800"/>
+          </a:xfrm>
+          <a:prstGeom prst="rect">
+            <a:avLst/>
+          </a:prstGeom>
+          <a:noFill/>
+        </p:spPr>
+        <p:txBody>
+          <a:bodyPr wrap="square">
+            <a:spAutoFit/>
+          </a:bodyPr>
+          <a:lstStyle/>
+          <a:p>
+            <a:pPr>
+              <a:spcAft>
+                <a:spcPts val="800"/>
+              </a:spcAft>
+            </a:pPr>
+            <a:r>
+              <a:rPr sz="1500" b="0">
+                <a:solidFill>
+                  <a:srgbClr val="6A665E"/>
+                </a:solidFill>
+                <a:latin typeface="Inter"/>
+              </a:rPr>
+              <a:t>Contract · memory</a:t>
+            </a:r>
+          </a:p>
+          <a:p>
+            <a:pPr>
+              <a:spcAft>
+                <a:spcPts val="800"/>
+              </a:spcAft>
+            </a:pPr>
+            <a:r>
+              <a:rPr sz="1500" b="0">
+                <a:solidFill>
+                  <a:srgbClr val="6A665E"/>
+                </a:solidFill>
+                <a:latin typeface="Inter"/>
+              </a:rPr>
+              <a:t>topology · when-to-run</a:t>
+            </a:r>
+          </a:p>
+          <a:p>
+            <a:pPr>
+              <a:spcAft>
+                <a:spcPts val="800"/>
+              </a:spcAft>
+            </a:pPr>
+            <a:r>
+              <a:rPr sz="1500" b="0">
+                <a:solidFill>
+                  <a:srgbClr val="6A665E"/>
+                </a:solidFill>
+                <a:latin typeface="Inter"/>
+              </a:rPr>
+              <a:t>multi-DSL · FSM</a:t>
+            </a:r>
+          </a:p>
+        </p:txBody>
+      </p:sp>
+      <p:sp>
+        <p:nvSpPr>
+          <p:cNvPr id="9" name="Rounded Rectangle 8"/>
+          <p:cNvSpPr/>
+          <p:nvPr/>
+        </p:nvSpPr>
+        <p:spPr>
+          <a:xfrm>
+            <a:off x="4297680" y="1417320"/>
+            <a:ext cx="3566160" cy="2926080"/>
+          </a:xfrm>
+          <a:prstGeom prst="roundRect">
+            <a:avLst>
+              <a:gd name="adj" fmla="val 8000"/>
+            </a:avLst>
+          </a:prstGeom>
+          <a:solidFill>
+            <a:srgbClr val="FFFFFF"/>
+          </a:solidFill>
+          <a:ln>
+            <a:solidFill>
+              <a:srgbClr val="D9D4CC"/>
+            </a:solidFill>
+          </a:ln>
+        </p:spPr>
+        <p:style>
+          <a:lnRef idx="1">
+            <a:schemeClr val="accent1"/>
+          </a:lnRef>
+          <a:fillRef idx="3">
+            <a:schemeClr val="accent1"/>
+          </a:fillRef>
+          <a:effectRef idx="2">
+            <a:schemeClr val="accent1"/>
+          </a:effectRef>
+          <a:fontRef idx="minor">
+            <a:schemeClr val="lt1"/>
+          </a:fontRef>
+        </p:style>
+        <p:txBody>
+          <a:bodyPr rtlCol="0" anchor="ctr"/>
+          <a:lstStyle/>
+          <a:p>
+            <a:pPr algn="ctr"/>
+          </a:p>
+        </p:txBody>
+      </p:sp>
+      <p:sp>
+        <p:nvSpPr>
+          <p:cNvPr id="10" name="Rectangle 9"/>
+          <p:cNvSpPr/>
+          <p:nvPr/>
+        </p:nvSpPr>
+        <p:spPr>
+          <a:xfrm>
+            <a:off x="4297680" y="1417320"/>
+            <a:ext cx="3566160" cy="109728"/>
+          </a:xfrm>
+          <a:prstGeom prst="rect">
+            <a:avLst/>
+          </a:prstGeom>
+          <a:solidFill>
+            <a:srgbClr val="B54A24"/>
+          </a:solidFill>
+          <a:ln>
+            <a:noFill/>
+          </a:ln>
+        </p:spPr>
+        <p:style>
+          <a:lnRef idx="1">
+            <a:schemeClr val="accent1"/>
+          </a:lnRef>
+          <a:fillRef idx="3">
+            <a:schemeClr val="accent1"/>
+          </a:fillRef>
+          <a:effectRef idx="2">
+            <a:schemeClr val="accent1"/>
+          </a:effectRef>
+          <a:fontRef idx="minor">
+            <a:schemeClr val="lt1"/>
+          </a:fontRef>
+        </p:style>
+        <p:txBody>
+          <a:bodyPr rtlCol="0" anchor="ctr"/>
+          <a:lstStyle/>
+          <a:p>
+            <a:pPr algn="ctr"/>
+          </a:p>
+        </p:txBody>
+      </p:sp>
+      <p:sp>
+        <p:nvSpPr>
+          <p:cNvPr id="11" name="TextBox 10"/>
+          <p:cNvSpPr txBox="1"/>
+          <p:nvPr/>
+        </p:nvSpPr>
+        <p:spPr>
+          <a:xfrm>
+            <a:off x="4526280" y="1737360"/>
+            <a:ext cx="3108960" cy="411480"/>
+          </a:xfrm>
+          <a:prstGeom prst="rect">
+            <a:avLst/>
+          </a:prstGeom>
+          <a:noFill/>
+        </p:spPr>
+        <p:txBody>
+          <a:bodyPr wrap="square">
+            <a:spAutoFit/>
+          </a:bodyPr>
+          <a:lstStyle/>
+          <a:p>
+            <a:pPr algn="l"/>
+            <a:r>
+              <a:rPr sz="1800" b="1">
+                <a:solidFill>
+                  <a:srgbClr val="12161C"/>
+                </a:solidFill>
+                <a:latin typeface="Noto Serif"/>
+              </a:rPr>
+              <a:t>Trust &amp; ops</a:t>
+            </a:r>
+          </a:p>
+        </p:txBody>
+      </p:sp>
+      <p:sp>
+        <p:nvSpPr>
+          <p:cNvPr id="12" name="TextBox 11"/>
+          <p:cNvSpPr txBox="1"/>
+          <p:nvPr/>
+        </p:nvSpPr>
+        <p:spPr>
+          <a:xfrm>
+            <a:off x="4526280" y="2286000"/>
+            <a:ext cx="3108960" cy="1828800"/>
+          </a:xfrm>
+          <a:prstGeom prst="rect">
+            <a:avLst/>
+          </a:prstGeom>
+          <a:noFill/>
+        </p:spPr>
+        <p:txBody>
+          <a:bodyPr wrap="square">
+            <a:spAutoFit/>
+          </a:bodyPr>
+          <a:lstStyle/>
+          <a:p>
+            <a:pPr>
+              <a:spcAft>
+                <a:spcPts val="800"/>
+              </a:spcAft>
+            </a:pPr>
+            <a:r>
+              <a:rPr sz="1500" b="0">
+                <a:solidFill>
+                  <a:srgbClr val="6A665E"/>
+                </a:solidFill>
+                <a:latin typeface="Inter"/>
+              </a:rPr>
+              <a:t>Oracles · ownership</a:t>
+            </a:r>
+          </a:p>
+          <a:p>
+            <a:pPr>
+              <a:spcAft>
+                <a:spcPts val="800"/>
+              </a:spcAft>
+            </a:pPr>
+            <a:r>
+              <a:rPr sz="1500" b="0">
+                <a:solidFill>
+                  <a:srgbClr val="6A665E"/>
+                </a:solidFill>
+                <a:latin typeface="Inter"/>
+              </a:rPr>
+              <a:t>versioning · HITL</a:t>
+            </a:r>
+          </a:p>
+          <a:p>
+            <a:pPr>
+              <a:spcAft>
+                <a:spcPts val="800"/>
+              </a:spcAft>
+            </a:pPr>
+            <a:r>
+              <a:rPr sz="1500" b="0">
+                <a:solidFill>
+                  <a:srgbClr val="6A665E"/>
+                </a:solidFill>
+                <a:latin typeface="Inter"/>
+              </a:rPr>
+              <a:t>DR · A/B gates</a:t>
+            </a:r>
+          </a:p>
+        </p:txBody>
+      </p:sp>
+      <p:sp>
+        <p:nvSpPr>
+          <p:cNvPr id="13" name="Rounded Rectangle 12"/>
+          <p:cNvSpPr/>
+          <p:nvPr/>
+        </p:nvSpPr>
+        <p:spPr>
+          <a:xfrm>
+            <a:off x="8138160" y="1417320"/>
+            <a:ext cx="3566160" cy="2926080"/>
+          </a:xfrm>
+          <a:prstGeom prst="roundRect">
+            <a:avLst>
+              <a:gd name="adj" fmla="val 8000"/>
+            </a:avLst>
+          </a:prstGeom>
+          <a:solidFill>
+            <a:srgbClr val="FFFFFF"/>
+          </a:solidFill>
+          <a:ln>
+            <a:solidFill>
+              <a:srgbClr val="D9D4CC"/>
+            </a:solidFill>
+          </a:ln>
+        </p:spPr>
+        <p:style>
+          <a:lnRef idx="1">
+            <a:schemeClr val="accent1"/>
+          </a:lnRef>
+          <a:fillRef idx="3">
+            <a:schemeClr val="accent1"/>
+          </a:fillRef>
+          <a:effectRef idx="2">
+            <a:schemeClr val="accent1"/>
+          </a:effectRef>
+          <a:fontRef idx="minor">
+            <a:schemeClr val="lt1"/>
+          </a:fontRef>
+        </p:style>
+        <p:txBody>
+          <a:bodyPr rtlCol="0" anchor="ctr"/>
+          <a:lstStyle/>
+          <a:p>
+            <a:pPr algn="ctr"/>
+          </a:p>
+        </p:txBody>
+      </p:sp>
+      <p:sp>
+        <p:nvSpPr>
+          <p:cNvPr id="14" name="Rectangle 13"/>
+          <p:cNvSpPr/>
+          <p:nvPr/>
+        </p:nvSpPr>
+        <p:spPr>
+          <a:xfrm>
+            <a:off x="8138160" y="1417320"/>
+            <a:ext cx="3566160" cy="109728"/>
+          </a:xfrm>
+          <a:prstGeom prst="rect">
+            <a:avLst/>
+          </a:prstGeom>
+          <a:solidFill>
+            <a:srgbClr val="12161C"/>
+          </a:solidFill>
+          <a:ln>
+            <a:noFill/>
+          </a:ln>
+        </p:spPr>
+        <p:style>
+          <a:lnRef idx="1">
+            <a:schemeClr val="accent1"/>
+          </a:lnRef>
+          <a:fillRef idx="3">
+            <a:schemeClr val="accent1"/>
+          </a:fillRef>
+          <a:effectRef idx="2">
+            <a:schemeClr val="accent1"/>
+          </a:effectRef>
+          <a:fontRef idx="minor">
+            <a:schemeClr val="lt1"/>
+          </a:fontRef>
+        </p:style>
+        <p:txBody>
+          <a:bodyPr rtlCol="0" anchor="ctr"/>
+          <a:lstStyle/>
+          <a:p>
+            <a:pPr algn="ctr"/>
+          </a:p>
+        </p:txBody>
+      </p:sp>
+      <p:sp>
+        <p:nvSpPr>
+          <p:cNvPr id="15" name="TextBox 14"/>
+          <p:cNvSpPr txBox="1"/>
+          <p:nvPr/>
+        </p:nvSpPr>
+        <p:spPr>
+          <a:xfrm>
+            <a:off x="8366760" y="1737360"/>
+            <a:ext cx="3108960" cy="411480"/>
+          </a:xfrm>
+          <a:prstGeom prst="rect">
+            <a:avLst/>
+          </a:prstGeom>
+          <a:noFill/>
+        </p:spPr>
+        <p:txBody>
+          <a:bodyPr wrap="square">
+            <a:spAutoFit/>
+          </a:bodyPr>
+          <a:lstStyle/>
+          <a:p>
+            <a:pPr algn="l"/>
+            <a:r>
+              <a:rPr sz="1800" b="1">
+                <a:solidFill>
+                  <a:srgbClr val="12161C"/>
+                </a:solidFill>
+                <a:latin typeface="Noto Serif"/>
+              </a:rPr>
+              <a:t>Business</a:t>
+            </a:r>
+          </a:p>
+        </p:txBody>
+      </p:sp>
+      <p:sp>
+        <p:nvSpPr>
+          <p:cNvPr id="16" name="TextBox 15"/>
+          <p:cNvSpPr txBox="1"/>
+          <p:nvPr/>
+        </p:nvSpPr>
+        <p:spPr>
+          <a:xfrm>
+            <a:off x="8366760" y="2286000"/>
+            <a:ext cx="3108960" cy="1828800"/>
+          </a:xfrm>
+          <a:prstGeom prst="rect">
+            <a:avLst/>
+          </a:prstGeom>
+          <a:noFill/>
+        </p:spPr>
+        <p:txBody>
+          <a:bodyPr wrap="square">
+            <a:spAutoFit/>
+          </a:bodyPr>
+          <a:lstStyle/>
+          <a:p>
+            <a:pPr>
+              <a:spcAft>
+                <a:spcPts val="800"/>
+              </a:spcAft>
+            </a:pPr>
+            <a:r>
+              <a:rPr sz="1500" b="0">
+                <a:solidFill>
+                  <a:srgbClr val="6A665E"/>
+                </a:solidFill>
+                <a:latin typeface="Inter"/>
+              </a:rPr>
+              <a:t>SKU · eval · pricing</a:t>
+            </a:r>
+          </a:p>
+          <a:p>
+            <a:pPr>
+              <a:spcAft>
+                <a:spcPts val="800"/>
+              </a:spcAft>
+            </a:pPr>
+            <a:r>
+              <a:rPr sz="1500" b="0">
+                <a:solidFill>
+                  <a:srgbClr val="6A665E"/>
+                </a:solidFill>
+                <a:latin typeface="Inter"/>
+              </a:rPr>
+              <a:t>tenancy · IP</a:t>
+            </a:r>
+          </a:p>
+          <a:p>
+            <a:pPr>
+              <a:spcAft>
+                <a:spcPts val="800"/>
+              </a:spcAft>
+            </a:pPr>
+            <a:r>
+              <a:rPr sz="1500" b="0">
+                <a:solidFill>
+                  <a:srgbClr val="6A665E"/>
+                </a:solidFill>
+                <a:latin typeface="Inter"/>
+              </a:rPr>
+              <a:t>tokens / capability</a:t>
+            </a:r>
+          </a:p>
+        </p:txBody>
+      </p:sp>
+      <p:sp>
+        <p:nvSpPr>
+          <p:cNvPr id="17" name="TextBox 16"/>
+          <p:cNvSpPr txBox="1"/>
+          <p:nvPr/>
+        </p:nvSpPr>
+        <p:spPr>
+          <a:xfrm>
+            <a:off x="640080" y="4617720"/>
+            <a:ext cx="10972800" cy="365760"/>
+          </a:xfrm>
+          <a:prstGeom prst="rect">
+            <a:avLst/>
+          </a:prstGeom>
+          <a:noFill/>
+        </p:spPr>
+        <p:txBody>
+          <a:bodyPr wrap="square">
+            <a:spAutoFit/>
+          </a:bodyPr>
+          <a:lstStyle/>
+          <a:p>
+            <a:pPr algn="l"/>
+            <a:r>
+              <a:rPr sz="1400" b="1">
                 <a:solidFill>
                   <a:srgbClr val="B54A24"/>
                 </a:solidFill>
+                <a:latin typeface="Inter"/>
+              </a:rPr>
+              <a:t>P23 verdict: tokens / latency / capability shape the SKU — falsify always-on LLM-as-opt, not frozen artifacts.</a:t>
+            </a:r>
+          </a:p>
+        </p:txBody>
+      </p:sp>
+      <p:sp>
+        <p:nvSpPr>
+          <p:cNvPr id="18" name="Rounded Rectangle 17"/>
+          <p:cNvSpPr/>
+          <p:nvPr/>
+        </p:nvSpPr>
+        <p:spPr>
+          <a:xfrm>
+            <a:off x="640080" y="5120640"/>
+            <a:ext cx="3566160" cy="1051560"/>
+          </a:xfrm>
+          <a:prstGeom prst="roundRect">
+            <a:avLst>
+              <a:gd name="adj" fmla="val 8000"/>
+            </a:avLst>
+          </a:prstGeom>
+          <a:solidFill>
+            <a:srgbClr val="E4EFED"/>
+          </a:solidFill>
+          <a:ln>
+            <a:noFill/>
+          </a:ln>
+        </p:spPr>
+        <p:style>
+          <a:lnRef idx="1">
+            <a:schemeClr val="accent1"/>
+          </a:lnRef>
+          <a:fillRef idx="3">
+            <a:schemeClr val="accent1"/>
+          </a:fillRef>
+          <a:effectRef idx="2">
+            <a:schemeClr val="accent1"/>
+          </a:effectRef>
+          <a:fontRef idx="minor">
+            <a:schemeClr val="lt1"/>
+          </a:fontRef>
+        </p:style>
+        <p:txBody>
+          <a:bodyPr rtlCol="0" anchor="ctr"/>
+          <a:lstStyle/>
+          <a:p>
+            <a:pPr algn="ctr"/>
+          </a:p>
+        </p:txBody>
+      </p:sp>
+      <p:sp>
+        <p:nvSpPr>
+          <p:cNvPr id="19" name="TextBox 18"/>
+          <p:cNvSpPr txBox="1"/>
+          <p:nvPr/>
+        </p:nvSpPr>
+        <p:spPr>
+          <a:xfrm>
+            <a:off x="822959" y="5212080"/>
+            <a:ext cx="3200400" cy="320040"/>
+          </a:xfrm>
+          <a:prstGeom prst="rect">
+            <a:avLst/>
+          </a:prstGeom>
+          <a:noFill/>
+        </p:spPr>
+        <p:txBody>
+          <a:bodyPr wrap="square">
+            <a:spAutoFit/>
+          </a:bodyPr>
+          <a:lstStyle/>
+          <a:p>
+            <a:pPr algn="l"/>
+            <a:r>
+              <a:rPr sz="1600" b="1">
+                <a:solidFill>
+                  <a:srgbClr val="12161C"/>
+                </a:solidFill>
                 <a:latin typeface="Noto Serif"/>
               </a:rPr>
-              <a:t>01</a:t>
-            </a:r>
-          </a:p>
-        </p:txBody>
-      </p:sp>
-      <p:sp>
-        <p:nvSpPr>
-          <p:cNvPr id="6" name="TextBox 5"/>
-          <p:cNvSpPr txBox="1"/>
-          <p:nvPr/>
-        </p:nvSpPr>
-        <p:spPr>
-          <a:xfrm>
-            <a:off x="1645920" y="1554480"/>
-            <a:ext cx="9601200" cy="365760"/>
+              <a:t>1. Search</a:t>
+            </a:r>
+          </a:p>
+        </p:txBody>
+      </p:sp>
+      <p:sp>
+        <p:nvSpPr>
+          <p:cNvPr id="20" name="TextBox 19"/>
+          <p:cNvSpPr txBox="1"/>
+          <p:nvPr/>
+        </p:nvSpPr>
+        <p:spPr>
+          <a:xfrm>
+            <a:off x="822959" y="5623560"/>
+            <a:ext cx="3200400" cy="320040"/>
           </a:xfrm>
           <a:prstGeom prst="rect">
             <a:avLst/>
@@ -6658,27 +7327,107 @@
           <a:p>
             <a:pPr algn="l"/>
             <a:r>
-              <a:rPr sz="1800" b="1">
+              <a:rPr sz="1300" b="0">
+                <a:solidFill>
+                  <a:srgbClr val="6A665E"/>
+                </a:solidFill>
+                <a:latin typeface="Inter"/>
+              </a:rPr>
+              <a:t>Amdahl-hot · oracle-gated</a:t>
+            </a:r>
+          </a:p>
+        </p:txBody>
+      </p:sp>
+      <p:sp>
+        <p:nvSpPr>
+          <p:cNvPr id="21" name="Rounded Rectangle 20"/>
+          <p:cNvSpPr/>
+          <p:nvPr/>
+        </p:nvSpPr>
+        <p:spPr>
+          <a:xfrm>
+            <a:off x="4480560" y="5120640"/>
+            <a:ext cx="3566160" cy="1051560"/>
+          </a:xfrm>
+          <a:prstGeom prst="roundRect">
+            <a:avLst>
+              <a:gd name="adj" fmla="val 8000"/>
+            </a:avLst>
+          </a:prstGeom>
+          <a:solidFill>
+            <a:srgbClr val="E4EFED"/>
+          </a:solidFill>
+          <a:ln>
+            <a:noFill/>
+          </a:ln>
+        </p:spPr>
+        <p:style>
+          <a:lnRef idx="1">
+            <a:schemeClr val="accent1"/>
+          </a:lnRef>
+          <a:fillRef idx="3">
+            <a:schemeClr val="accent1"/>
+          </a:fillRef>
+          <a:effectRef idx="2">
+            <a:schemeClr val="accent1"/>
+          </a:effectRef>
+          <a:fontRef idx="minor">
+            <a:schemeClr val="lt1"/>
+          </a:fontRef>
+        </p:style>
+        <p:txBody>
+          <a:bodyPr rtlCol="0" anchor="ctr"/>
+          <a:lstStyle/>
+          <a:p>
+            <a:pPr algn="ctr"/>
+          </a:p>
+        </p:txBody>
+      </p:sp>
+      <p:sp>
+        <p:nvSpPr>
+          <p:cNvPr id="22" name="TextBox 21"/>
+          <p:cNvSpPr txBox="1"/>
+          <p:nvPr/>
+        </p:nvSpPr>
+        <p:spPr>
+          <a:xfrm>
+            <a:off x="4663440" y="5212080"/>
+            <a:ext cx="3200400" cy="320040"/>
+          </a:xfrm>
+          <a:prstGeom prst="rect">
+            <a:avLst/>
+          </a:prstGeom>
+          <a:noFill/>
+        </p:spPr>
+        <p:txBody>
+          <a:bodyPr wrap="square">
+            <a:spAutoFit/>
+          </a:bodyPr>
+          <a:lstStyle/>
+          <a:p>
+            <a:pPr algn="l"/>
+            <a:r>
+              <a:rPr sz="1600" b="1">
                 <a:solidFill>
                   <a:srgbClr val="12161C"/>
                 </a:solidFill>
                 <a:latin typeface="Noto Serif"/>
               </a:rPr>
-              <a:t>Online or offline first?</a:t>
-            </a:r>
-          </a:p>
-        </p:txBody>
-      </p:sp>
-      <p:sp>
-        <p:nvSpPr>
-          <p:cNvPr id="7" name="TextBox 6"/>
-          <p:cNvSpPr txBox="1"/>
-          <p:nvPr/>
-        </p:nvSpPr>
-        <p:spPr>
-          <a:xfrm>
-            <a:off x="1645920" y="1965960"/>
-            <a:ext cx="9601200" cy="365760"/>
+              <a:t>2. Freeze</a:t>
+            </a:r>
+          </a:p>
+        </p:txBody>
+      </p:sp>
+      <p:sp>
+        <p:nvSpPr>
+          <p:cNvPr id="23" name="TextBox 22"/>
+          <p:cNvSpPr txBox="1"/>
+          <p:nvPr/>
+        </p:nvSpPr>
+        <p:spPr>
+          <a:xfrm>
+            <a:off x="4663440" y="5623560"/>
+            <a:ext cx="3200400" cy="320040"/>
           </a:xfrm>
           <a:prstGeom prst="rect">
             <a:avLst/>
@@ -6693,27 +7442,72 @@
           <a:p>
             <a:pPr algn="l"/>
             <a:r>
-              <a:rPr sz="1400" b="0">
+              <a:rPr sz="1300" b="0">
                 <a:solidFill>
                   <a:srgbClr val="6A665E"/>
                 </a:solidFill>
                 <a:latin typeface="Inter"/>
               </a:rPr>
-              <a:t>Specialize workloads, or evolve the compiler once?</a:t>
-            </a:r>
-          </a:p>
-        </p:txBody>
-      </p:sp>
-      <p:sp>
-        <p:nvSpPr>
-          <p:cNvPr id="8" name="TextBox 7"/>
-          <p:cNvSpPr txBox="1"/>
-          <p:nvPr/>
-        </p:nvSpPr>
-        <p:spPr>
-          <a:xfrm>
-            <a:off x="640080" y="2651760"/>
-            <a:ext cx="914400" cy="457200"/>
+              <a:t>ACF / kernel → VCS</a:t>
+            </a:r>
+          </a:p>
+        </p:txBody>
+      </p:sp>
+      <p:sp>
+        <p:nvSpPr>
+          <p:cNvPr id="24" name="Rounded Rectangle 23"/>
+          <p:cNvSpPr/>
+          <p:nvPr/>
+        </p:nvSpPr>
+        <p:spPr>
+          <a:xfrm>
+            <a:off x="8321040" y="5120640"/>
+            <a:ext cx="3566160" cy="1051560"/>
+          </a:xfrm>
+          <a:prstGeom prst="roundRect">
+            <a:avLst>
+              <a:gd name="adj" fmla="val 8000"/>
+            </a:avLst>
+          </a:prstGeom>
+          <a:solidFill>
+            <a:srgbClr val="F6EBE4"/>
+          </a:solidFill>
+          <a:ln>
+            <a:noFill/>
+          </a:ln>
+        </p:spPr>
+        <p:style>
+          <a:lnRef idx="1">
+            <a:schemeClr val="accent1"/>
+          </a:lnRef>
+          <a:fillRef idx="3">
+            <a:schemeClr val="accent1"/>
+          </a:fillRef>
+          <a:effectRef idx="2">
+            <a:schemeClr val="accent1"/>
+          </a:effectRef>
+          <a:fontRef idx="minor">
+            <a:schemeClr val="lt1"/>
+          </a:fontRef>
+        </p:style>
+        <p:txBody>
+          <a:bodyPr rtlCol="0" anchor="ctr"/>
+          <a:lstStyle/>
+          <a:p>
+            <a:pPr algn="ctr"/>
+          </a:p>
+        </p:txBody>
+      </p:sp>
+      <p:sp>
+        <p:nvSpPr>
+          <p:cNvPr id="25" name="TextBox 24"/>
+          <p:cNvSpPr txBox="1"/>
+          <p:nvPr/>
+        </p:nvSpPr>
+        <p:spPr>
+          <a:xfrm>
+            <a:off x="8503919" y="5212080"/>
+            <a:ext cx="3200400" cy="320040"/>
           </a:xfrm>
           <a:prstGeom prst="rect">
             <a:avLst/>
@@ -6728,27 +7522,27 @@
           <a:p>
             <a:pPr algn="l"/>
             <a:r>
-              <a:rPr sz="2000" b="1">
-                <a:solidFill>
-                  <a:srgbClr val="B54A24"/>
+              <a:rPr sz="1600" b="1">
+                <a:solidFill>
+                  <a:srgbClr val="12161C"/>
                 </a:solidFill>
                 <a:latin typeface="Noto Serif"/>
               </a:rPr>
-              <a:t>02</a:t>
-            </a:r>
-          </a:p>
-        </p:txBody>
-      </p:sp>
-      <p:sp>
-        <p:nvSpPr>
-          <p:cNvPr id="9" name="TextBox 8"/>
-          <p:cNvSpPr txBox="1"/>
-          <p:nvPr/>
-        </p:nvSpPr>
-        <p:spPr>
-          <a:xfrm>
-            <a:off x="1645920" y="2651760"/>
-            <a:ext cx="9601200" cy="365760"/>
+              <a:t>3. Serve</a:t>
+            </a:r>
+          </a:p>
+        </p:txBody>
+      </p:sp>
+      <p:sp>
+        <p:nvSpPr>
+          <p:cNvPr id="26" name="TextBox 25"/>
+          <p:cNvSpPr txBox="1"/>
+          <p:nvPr/>
+        </p:nvSpPr>
+        <p:spPr>
+          <a:xfrm>
+            <a:off x="8503919" y="5623560"/>
+            <a:ext cx="3200400" cy="320040"/>
           </a:xfrm>
           <a:prstGeom prst="rect">
             <a:avLst/>
@@ -6763,265 +7557,20 @@
           <a:p>
             <a:pPr algn="l"/>
             <a:r>
-              <a:rPr sz="1800" b="1">
-                <a:solidFill>
-                  <a:srgbClr val="12161C"/>
-                </a:solidFill>
-                <a:latin typeface="Noto Serif"/>
-              </a:rPr>
-              <a:t>What is the oracle?</a:t>
-            </a:r>
-          </a:p>
-        </p:txBody>
-      </p:sp>
-      <p:sp>
-        <p:nvSpPr>
-          <p:cNvPr id="10" name="TextBox 9"/>
-          <p:cNvSpPr txBox="1"/>
-          <p:nvPr/>
-        </p:nvSpPr>
-        <p:spPr>
-          <a:xfrm>
-            <a:off x="1645920" y="3063240"/>
-            <a:ext cx="9601200" cy="365760"/>
-          </a:xfrm>
-          <a:prstGeom prst="rect">
-            <a:avLst/>
-          </a:prstGeom>
-          <a:noFill/>
-        </p:spPr>
-        <p:txBody>
-          <a:bodyPr wrap="square">
-            <a:spAutoFit/>
-          </a:bodyPr>
-          <a:lstStyle/>
-          <a:p>
-            <a:pPr algn="l"/>
-            <a:r>
-              <a:rPr sz="1400" b="0">
+              <a:rPr sz="1300" b="0">
                 <a:solidFill>
                   <a:srgbClr val="6A665E"/>
                 </a:solidFill>
                 <a:latin typeface="Inter"/>
               </a:rPr>
-              <a:t>Alive2, golden kernels, OpInfo, serving A/B — who owns false negatives?</a:t>
-            </a:r>
-          </a:p>
-        </p:txBody>
-      </p:sp>
-      <p:sp>
-        <p:nvSpPr>
-          <p:cNvPr id="11" name="TextBox 10"/>
-          <p:cNvSpPr txBox="1"/>
-          <p:nvPr/>
-        </p:nvSpPr>
-        <p:spPr>
-          <a:xfrm>
-            <a:off x="640080" y="3749039"/>
-            <a:ext cx="914400" cy="457200"/>
-          </a:xfrm>
-          <a:prstGeom prst="rect">
-            <a:avLst/>
-          </a:prstGeom>
-          <a:noFill/>
-        </p:spPr>
-        <p:txBody>
-          <a:bodyPr wrap="square">
-            <a:spAutoFit/>
-          </a:bodyPr>
-          <a:lstStyle/>
-          <a:p>
-            <a:pPr algn="l"/>
-            <a:r>
-              <a:rPr sz="2000" b="1">
-                <a:solidFill>
-                  <a:srgbClr val="B54A24"/>
-                </a:solidFill>
-                <a:latin typeface="Noto Serif"/>
-              </a:rPr>
-              <a:t>03</a:t>
-            </a:r>
-          </a:p>
-        </p:txBody>
-      </p:sp>
-      <p:sp>
-        <p:nvSpPr>
-          <p:cNvPr id="12" name="TextBox 11"/>
-          <p:cNvSpPr txBox="1"/>
-          <p:nvPr/>
-        </p:nvSpPr>
-        <p:spPr>
-          <a:xfrm>
-            <a:off x="1645920" y="3749039"/>
-            <a:ext cx="9601200" cy="365760"/>
-          </a:xfrm>
-          <a:prstGeom prst="rect">
-            <a:avLst/>
-          </a:prstGeom>
-          <a:noFill/>
-        </p:spPr>
-        <p:txBody>
-          <a:bodyPr wrap="square">
-            <a:spAutoFit/>
-          </a:bodyPr>
-          <a:lstStyle/>
-          <a:p>
-            <a:pPr algn="l"/>
-            <a:r>
-              <a:rPr sz="1800" b="1">
-                <a:solidFill>
-                  <a:srgbClr val="12161C"/>
-                </a:solidFill>
-                <a:latin typeface="Noto Serif"/>
-              </a:rPr>
-              <a:t>Which agent contract IR?</a:t>
-            </a:r>
-          </a:p>
-        </p:txBody>
-      </p:sp>
-      <p:sp>
-        <p:nvSpPr>
-          <p:cNvPr id="13" name="TextBox 12"/>
-          <p:cNvSpPr txBox="1"/>
-          <p:nvPr/>
-        </p:nvSpPr>
-        <p:spPr>
-          <a:xfrm>
-            <a:off x="1645920" y="4160520"/>
-            <a:ext cx="9601200" cy="365760"/>
-          </a:xfrm>
-          <a:prstGeom prst="rect">
-            <a:avLst/>
-          </a:prstGeom>
-          <a:noFill/>
-        </p:spPr>
-        <p:txBody>
-          <a:bodyPr wrap="square">
-            <a:spAutoFit/>
-          </a:bodyPr>
-          <a:lstStyle/>
-          <a:p>
-            <a:pPr algn="l"/>
-            <a:r>
-              <a:rPr sz="1400" b="0">
-                <a:solidFill>
-                  <a:srgbClr val="6A665E"/>
-                </a:solidFill>
-                <a:latin typeface="Inter"/>
-              </a:rPr>
-              <a:t>LLVM, MLIR, Triton, StableHLO, Tile — pick intentionally.</a:t>
-            </a:r>
-          </a:p>
-        </p:txBody>
-      </p:sp>
-      <p:sp>
-        <p:nvSpPr>
-          <p:cNvPr id="14" name="TextBox 13"/>
-          <p:cNvSpPr txBox="1"/>
-          <p:nvPr/>
-        </p:nvSpPr>
-        <p:spPr>
-          <a:xfrm>
-            <a:off x="640080" y="4846320"/>
-            <a:ext cx="914400" cy="457200"/>
-          </a:xfrm>
-          <a:prstGeom prst="rect">
-            <a:avLst/>
-          </a:prstGeom>
-          <a:noFill/>
-        </p:spPr>
-        <p:txBody>
-          <a:bodyPr wrap="square">
-            <a:spAutoFit/>
-          </a:bodyPr>
-          <a:lstStyle/>
-          <a:p>
-            <a:pPr algn="l"/>
-            <a:r>
-              <a:rPr sz="2000" b="1">
-                <a:solidFill>
-                  <a:srgbClr val="B54A24"/>
-                </a:solidFill>
-                <a:latin typeface="Noto Serif"/>
-              </a:rPr>
-              <a:t>04</a:t>
-            </a:r>
-          </a:p>
-        </p:txBody>
-      </p:sp>
-      <p:sp>
-        <p:nvSpPr>
-          <p:cNvPr id="15" name="TextBox 14"/>
-          <p:cNvSpPr txBox="1"/>
-          <p:nvPr/>
-        </p:nvSpPr>
-        <p:spPr>
-          <a:xfrm>
-            <a:off x="1645920" y="4846320"/>
-            <a:ext cx="9601200" cy="365760"/>
-          </a:xfrm>
-          <a:prstGeom prst="rect">
-            <a:avLst/>
-          </a:prstGeom>
-          <a:noFill/>
-        </p:spPr>
-        <p:txBody>
-          <a:bodyPr wrap="square">
-            <a:spAutoFit/>
-          </a:bodyPr>
-          <a:lstStyle/>
-          <a:p>
-            <a:pPr algn="l"/>
-            <a:r>
-              <a:rPr sz="1800" b="1">
-                <a:solidFill>
-                  <a:srgbClr val="12161C"/>
-                </a:solidFill>
-                <a:latin typeface="Noto Serif"/>
-              </a:rPr>
-              <a:t>Who owns agent artifacts?</a:t>
-            </a:r>
-          </a:p>
-        </p:txBody>
-      </p:sp>
-      <p:sp>
-        <p:nvSpPr>
-          <p:cNvPr id="16" name="TextBox 15"/>
-          <p:cNvSpPr txBox="1"/>
-          <p:nvPr/>
-        </p:nvSpPr>
-        <p:spPr>
-          <a:xfrm>
-            <a:off x="1645920" y="5257800"/>
-            <a:ext cx="9601200" cy="365760"/>
-          </a:xfrm>
-          <a:prstGeom prst="rect">
-            <a:avLst/>
-          </a:prstGeom>
-          <a:noFill/>
-        </p:spPr>
-        <p:txBody>
-          <a:bodyPr wrap="square">
-            <a:spAutoFit/>
-          </a:bodyPr>
-          <a:lstStyle/>
-          <a:p>
-            <a:pPr algn="l"/>
-            <a:r>
-              <a:rPr sz="1400" b="0">
-                <a:solidFill>
-                  <a:srgbClr val="6A665E"/>
-                </a:solidFill>
-                <a:latin typeface="Inter"/>
-              </a:rPr>
-              <a:t>Named maintainer six months after merge.</a:t>
-            </a:r>
-          </a:p>
-        </p:txBody>
-      </p:sp>
-      <p:sp>
-        <p:nvSpPr>
-          <p:cNvPr id="17" name="TextBox 16"/>
+              <a:t>Zero LLM calls</a:t>
+            </a:r>
+          </a:p>
+        </p:txBody>
+      </p:sp>
+      <p:sp>
+        <p:nvSpPr>
+          <p:cNvPr id="27" name="TextBox 26"/>
           <p:cNvSpPr txBox="1"/>
           <p:nvPr/>
         </p:nvSpPr>
@@ -7056,7 +7605,7 @@
       </p:sp>
       <p:sp>
         <p:nvSpPr>
-          <p:cNvPr id="18" name="TextBox 17"/>
+          <p:cNvPr id="28" name="TextBox 27"/>
           <p:cNvSpPr txBox="1"/>
           <p:nvPr/>
         </p:nvSpPr>
@@ -7084,7 +7633,7 @@
                 </a:solidFill>
                 <a:latin typeface="Inter"/>
               </a:rPr>
-              <a:t>14 / 15</a:t>
+              <a:t>14 / 16</a:t>
             </a:r>
           </a:p>
         </p:txBody>
@@ -7152,6 +7701,732 @@
       </p:sp>
       <p:sp>
         <p:nvSpPr>
+          <p:cNvPr id="3" name="TextBox 2"/>
+          <p:cNvSpPr txBox="1"/>
+          <p:nvPr/>
+        </p:nvSpPr>
+        <p:spPr>
+          <a:xfrm>
+            <a:off x="640080" y="365760"/>
+            <a:ext cx="3657600" cy="274320"/>
+          </a:xfrm>
+          <a:prstGeom prst="rect">
+            <a:avLst/>
+          </a:prstGeom>
+          <a:noFill/>
+        </p:spPr>
+        <p:txBody>
+          <a:bodyPr wrap="square">
+            <a:spAutoFit/>
+          </a:bodyPr>
+          <a:lstStyle/>
+          <a:p>
+            <a:pPr algn="l"/>
+            <a:r>
+              <a:rPr sz="1100" b="1">
+                <a:solidFill>
+                  <a:srgbClr val="B54A24"/>
+                </a:solidFill>
+                <a:latin typeface="Inter"/>
+              </a:rPr>
+              <a:t>14  —  IF YOU ADOPT THIS</a:t>
+            </a:r>
+          </a:p>
+        </p:txBody>
+      </p:sp>
+      <p:sp>
+        <p:nvSpPr>
+          <p:cNvPr id="4" name="TextBox 3"/>
+          <p:cNvSpPr txBox="1"/>
+          <p:nvPr/>
+        </p:nvSpPr>
+        <p:spPr>
+          <a:xfrm>
+            <a:off x="640080" y="777240"/>
+            <a:ext cx="10972800" cy="502920"/>
+          </a:xfrm>
+          <a:prstGeom prst="rect">
+            <a:avLst/>
+          </a:prstGeom>
+          <a:noFill/>
+        </p:spPr>
+        <p:txBody>
+          <a:bodyPr wrap="square">
+            <a:spAutoFit/>
+          </a:bodyPr>
+          <a:lstStyle/>
+          <a:p>
+            <a:pPr algn="l"/>
+            <a:r>
+              <a:rPr sz="2800" b="1">
+                <a:solidFill>
+                  <a:srgbClr val="12161C"/>
+                </a:solidFill>
+                <a:latin typeface="Noto Serif"/>
+              </a:rPr>
+              <a:t>Questions before tools.</a:t>
+            </a:r>
+          </a:p>
+        </p:txBody>
+      </p:sp>
+      <p:sp>
+        <p:nvSpPr>
+          <p:cNvPr id="5" name="TextBox 4"/>
+          <p:cNvSpPr txBox="1"/>
+          <p:nvPr/>
+        </p:nvSpPr>
+        <p:spPr>
+          <a:xfrm>
+            <a:off x="640080" y="1417320"/>
+            <a:ext cx="914400" cy="365760"/>
+          </a:xfrm>
+          <a:prstGeom prst="rect">
+            <a:avLst/>
+          </a:prstGeom>
+          <a:noFill/>
+        </p:spPr>
+        <p:txBody>
+          <a:bodyPr wrap="square">
+            <a:spAutoFit/>
+          </a:bodyPr>
+          <a:lstStyle/>
+          <a:p>
+            <a:pPr algn="l"/>
+            <a:r>
+              <a:rPr sz="1800" b="1">
+                <a:solidFill>
+                  <a:srgbClr val="B54A24"/>
+                </a:solidFill>
+                <a:latin typeface="Noto Serif"/>
+              </a:rPr>
+              <a:t>01</a:t>
+            </a:r>
+          </a:p>
+        </p:txBody>
+      </p:sp>
+      <p:sp>
+        <p:nvSpPr>
+          <p:cNvPr id="6" name="TextBox 5"/>
+          <p:cNvSpPr txBox="1"/>
+          <p:nvPr/>
+        </p:nvSpPr>
+        <p:spPr>
+          <a:xfrm>
+            <a:off x="1645920" y="1417320"/>
+            <a:ext cx="9601200" cy="320040"/>
+          </a:xfrm>
+          <a:prstGeom prst="rect">
+            <a:avLst/>
+          </a:prstGeom>
+          <a:noFill/>
+        </p:spPr>
+        <p:txBody>
+          <a:bodyPr wrap="square">
+            <a:spAutoFit/>
+          </a:bodyPr>
+          <a:lstStyle/>
+          <a:p>
+            <a:pPr algn="l"/>
+            <a:r>
+              <a:rPr sz="1600" b="1">
+                <a:solidFill>
+                  <a:srgbClr val="12161C"/>
+                </a:solidFill>
+                <a:latin typeface="Noto Serif"/>
+              </a:rPr>
+              <a:t>Online or offline first?</a:t>
+            </a:r>
+          </a:p>
+        </p:txBody>
+      </p:sp>
+      <p:sp>
+        <p:nvSpPr>
+          <p:cNvPr id="7" name="TextBox 6"/>
+          <p:cNvSpPr txBox="1"/>
+          <p:nvPr/>
+        </p:nvSpPr>
+        <p:spPr>
+          <a:xfrm>
+            <a:off x="1645920" y="1764792"/>
+            <a:ext cx="9601200" cy="320040"/>
+          </a:xfrm>
+          <a:prstGeom prst="rect">
+            <a:avLst/>
+          </a:prstGeom>
+          <a:noFill/>
+        </p:spPr>
+        <p:txBody>
+          <a:bodyPr wrap="square">
+            <a:spAutoFit/>
+          </a:bodyPr>
+          <a:lstStyle/>
+          <a:p>
+            <a:pPr algn="l"/>
+            <a:r>
+              <a:rPr sz="1300" b="0">
+                <a:solidFill>
+                  <a:srgbClr val="6A665E"/>
+                </a:solidFill>
+                <a:latin typeface="Inter"/>
+              </a:rPr>
+              <a:t>Specialize workloads, or evolve the compiler once?</a:t>
+            </a:r>
+          </a:p>
+        </p:txBody>
+      </p:sp>
+      <p:sp>
+        <p:nvSpPr>
+          <p:cNvPr id="8" name="TextBox 7"/>
+          <p:cNvSpPr txBox="1"/>
+          <p:nvPr/>
+        </p:nvSpPr>
+        <p:spPr>
+          <a:xfrm>
+            <a:off x="640080" y="2331720"/>
+            <a:ext cx="914400" cy="365760"/>
+          </a:xfrm>
+          <a:prstGeom prst="rect">
+            <a:avLst/>
+          </a:prstGeom>
+          <a:noFill/>
+        </p:spPr>
+        <p:txBody>
+          <a:bodyPr wrap="square">
+            <a:spAutoFit/>
+          </a:bodyPr>
+          <a:lstStyle/>
+          <a:p>
+            <a:pPr algn="l"/>
+            <a:r>
+              <a:rPr sz="1800" b="1">
+                <a:solidFill>
+                  <a:srgbClr val="B54A24"/>
+                </a:solidFill>
+                <a:latin typeface="Noto Serif"/>
+              </a:rPr>
+              <a:t>02</a:t>
+            </a:r>
+          </a:p>
+        </p:txBody>
+      </p:sp>
+      <p:sp>
+        <p:nvSpPr>
+          <p:cNvPr id="9" name="TextBox 8"/>
+          <p:cNvSpPr txBox="1"/>
+          <p:nvPr/>
+        </p:nvSpPr>
+        <p:spPr>
+          <a:xfrm>
+            <a:off x="1645920" y="2331720"/>
+            <a:ext cx="9601200" cy="320040"/>
+          </a:xfrm>
+          <a:prstGeom prst="rect">
+            <a:avLst/>
+          </a:prstGeom>
+          <a:noFill/>
+        </p:spPr>
+        <p:txBody>
+          <a:bodyPr wrap="square">
+            <a:spAutoFit/>
+          </a:bodyPr>
+          <a:lstStyle/>
+          <a:p>
+            <a:pPr algn="l"/>
+            <a:r>
+              <a:rPr sz="1600" b="1">
+                <a:solidFill>
+                  <a:srgbClr val="12161C"/>
+                </a:solidFill>
+                <a:latin typeface="Noto Serif"/>
+              </a:rPr>
+              <a:t>What is the oracle?</a:t>
+            </a:r>
+          </a:p>
+        </p:txBody>
+      </p:sp>
+      <p:sp>
+        <p:nvSpPr>
+          <p:cNvPr id="10" name="TextBox 9"/>
+          <p:cNvSpPr txBox="1"/>
+          <p:nvPr/>
+        </p:nvSpPr>
+        <p:spPr>
+          <a:xfrm>
+            <a:off x="1645920" y="2679191"/>
+            <a:ext cx="9601200" cy="320040"/>
+          </a:xfrm>
+          <a:prstGeom prst="rect">
+            <a:avLst/>
+          </a:prstGeom>
+          <a:noFill/>
+        </p:spPr>
+        <p:txBody>
+          <a:bodyPr wrap="square">
+            <a:spAutoFit/>
+          </a:bodyPr>
+          <a:lstStyle/>
+          <a:p>
+            <a:pPr algn="l"/>
+            <a:r>
+              <a:rPr sz="1300" b="0">
+                <a:solidFill>
+                  <a:srgbClr val="6A665E"/>
+                </a:solidFill>
+                <a:latin typeface="Inter"/>
+              </a:rPr>
+              <a:t>Alive2, golden kernels, OpInfo, serving A/B — who owns false negatives?</a:t>
+            </a:r>
+          </a:p>
+        </p:txBody>
+      </p:sp>
+      <p:sp>
+        <p:nvSpPr>
+          <p:cNvPr id="11" name="TextBox 10"/>
+          <p:cNvSpPr txBox="1"/>
+          <p:nvPr/>
+        </p:nvSpPr>
+        <p:spPr>
+          <a:xfrm>
+            <a:off x="640080" y="3246120"/>
+            <a:ext cx="914400" cy="365760"/>
+          </a:xfrm>
+          <a:prstGeom prst="rect">
+            <a:avLst/>
+          </a:prstGeom>
+          <a:noFill/>
+        </p:spPr>
+        <p:txBody>
+          <a:bodyPr wrap="square">
+            <a:spAutoFit/>
+          </a:bodyPr>
+          <a:lstStyle/>
+          <a:p>
+            <a:pPr algn="l"/>
+            <a:r>
+              <a:rPr sz="1800" b="1">
+                <a:solidFill>
+                  <a:srgbClr val="B54A24"/>
+                </a:solidFill>
+                <a:latin typeface="Noto Serif"/>
+              </a:rPr>
+              <a:t>03</a:t>
+            </a:r>
+          </a:p>
+        </p:txBody>
+      </p:sp>
+      <p:sp>
+        <p:nvSpPr>
+          <p:cNvPr id="12" name="TextBox 11"/>
+          <p:cNvSpPr txBox="1"/>
+          <p:nvPr/>
+        </p:nvSpPr>
+        <p:spPr>
+          <a:xfrm>
+            <a:off x="1645920" y="3246120"/>
+            <a:ext cx="9601200" cy="320040"/>
+          </a:xfrm>
+          <a:prstGeom prst="rect">
+            <a:avLst/>
+          </a:prstGeom>
+          <a:noFill/>
+        </p:spPr>
+        <p:txBody>
+          <a:bodyPr wrap="square">
+            <a:spAutoFit/>
+          </a:bodyPr>
+          <a:lstStyle/>
+          <a:p>
+            <a:pPr algn="l"/>
+            <a:r>
+              <a:rPr sz="1600" b="1">
+                <a:solidFill>
+                  <a:srgbClr val="12161C"/>
+                </a:solidFill>
+                <a:latin typeface="Noto Serif"/>
+              </a:rPr>
+              <a:t>Which agent contract IR?</a:t>
+            </a:r>
+          </a:p>
+        </p:txBody>
+      </p:sp>
+      <p:sp>
+        <p:nvSpPr>
+          <p:cNvPr id="13" name="TextBox 12"/>
+          <p:cNvSpPr txBox="1"/>
+          <p:nvPr/>
+        </p:nvSpPr>
+        <p:spPr>
+          <a:xfrm>
+            <a:off x="1645920" y="3593591"/>
+            <a:ext cx="9601200" cy="320040"/>
+          </a:xfrm>
+          <a:prstGeom prst="rect">
+            <a:avLst/>
+          </a:prstGeom>
+          <a:noFill/>
+        </p:spPr>
+        <p:txBody>
+          <a:bodyPr wrap="square">
+            <a:spAutoFit/>
+          </a:bodyPr>
+          <a:lstStyle/>
+          <a:p>
+            <a:pPr algn="l"/>
+            <a:r>
+              <a:rPr sz="1300" b="0">
+                <a:solidFill>
+                  <a:srgbClr val="6A665E"/>
+                </a:solidFill>
+                <a:latin typeface="Inter"/>
+              </a:rPr>
+              <a:t>LLVM, MLIR, Triton, StableHLO, Tile — pick intentionally.</a:t>
+            </a:r>
+          </a:p>
+        </p:txBody>
+      </p:sp>
+      <p:sp>
+        <p:nvSpPr>
+          <p:cNvPr id="14" name="TextBox 13"/>
+          <p:cNvSpPr txBox="1"/>
+          <p:nvPr/>
+        </p:nvSpPr>
+        <p:spPr>
+          <a:xfrm>
+            <a:off x="640080" y="4160520"/>
+            <a:ext cx="914400" cy="365760"/>
+          </a:xfrm>
+          <a:prstGeom prst="rect">
+            <a:avLst/>
+          </a:prstGeom>
+          <a:noFill/>
+        </p:spPr>
+        <p:txBody>
+          <a:bodyPr wrap="square">
+            <a:spAutoFit/>
+          </a:bodyPr>
+          <a:lstStyle/>
+          <a:p>
+            <a:pPr algn="l"/>
+            <a:r>
+              <a:rPr sz="1800" b="1">
+                <a:solidFill>
+                  <a:srgbClr val="B54A24"/>
+                </a:solidFill>
+                <a:latin typeface="Noto Serif"/>
+              </a:rPr>
+              <a:t>04</a:t>
+            </a:r>
+          </a:p>
+        </p:txBody>
+      </p:sp>
+      <p:sp>
+        <p:nvSpPr>
+          <p:cNvPr id="15" name="TextBox 14"/>
+          <p:cNvSpPr txBox="1"/>
+          <p:nvPr/>
+        </p:nvSpPr>
+        <p:spPr>
+          <a:xfrm>
+            <a:off x="1645920" y="4160520"/>
+            <a:ext cx="9601200" cy="320040"/>
+          </a:xfrm>
+          <a:prstGeom prst="rect">
+            <a:avLst/>
+          </a:prstGeom>
+          <a:noFill/>
+        </p:spPr>
+        <p:txBody>
+          <a:bodyPr wrap="square">
+            <a:spAutoFit/>
+          </a:bodyPr>
+          <a:lstStyle/>
+          <a:p>
+            <a:pPr algn="l"/>
+            <a:r>
+              <a:rPr sz="1600" b="1">
+                <a:solidFill>
+                  <a:srgbClr val="12161C"/>
+                </a:solidFill>
+                <a:latin typeface="Noto Serif"/>
+              </a:rPr>
+              <a:t>Who owns agent artifacts?</a:t>
+            </a:r>
+          </a:p>
+        </p:txBody>
+      </p:sp>
+      <p:sp>
+        <p:nvSpPr>
+          <p:cNvPr id="16" name="TextBox 15"/>
+          <p:cNvSpPr txBox="1"/>
+          <p:nvPr/>
+        </p:nvSpPr>
+        <p:spPr>
+          <a:xfrm>
+            <a:off x="1645920" y="4507992"/>
+            <a:ext cx="9601200" cy="320040"/>
+          </a:xfrm>
+          <a:prstGeom prst="rect">
+            <a:avLst/>
+          </a:prstGeom>
+          <a:noFill/>
+        </p:spPr>
+        <p:txBody>
+          <a:bodyPr wrap="square">
+            <a:spAutoFit/>
+          </a:bodyPr>
+          <a:lstStyle/>
+          <a:p>
+            <a:pPr algn="l"/>
+            <a:r>
+              <a:rPr sz="1300" b="0">
+                <a:solidFill>
+                  <a:srgbClr val="6A665E"/>
+                </a:solidFill>
+                <a:latin typeface="Inter"/>
+              </a:rPr>
+              <a:t>Named maintainer six months after merge.</a:t>
+            </a:r>
+          </a:p>
+        </p:txBody>
+      </p:sp>
+      <p:sp>
+        <p:nvSpPr>
+          <p:cNvPr id="17" name="TextBox 16"/>
+          <p:cNvSpPr txBox="1"/>
+          <p:nvPr/>
+        </p:nvSpPr>
+        <p:spPr>
+          <a:xfrm>
+            <a:off x="640080" y="5074920"/>
+            <a:ext cx="914400" cy="365760"/>
+          </a:xfrm>
+          <a:prstGeom prst="rect">
+            <a:avLst/>
+          </a:prstGeom>
+          <a:noFill/>
+        </p:spPr>
+        <p:txBody>
+          <a:bodyPr wrap="square">
+            <a:spAutoFit/>
+          </a:bodyPr>
+          <a:lstStyle/>
+          <a:p>
+            <a:pPr algn="l"/>
+            <a:r>
+              <a:rPr sz="1800" b="1">
+                <a:solidFill>
+                  <a:srgbClr val="B54A24"/>
+                </a:solidFill>
+                <a:latin typeface="Noto Serif"/>
+              </a:rPr>
+              <a:t>05</a:t>
+            </a:r>
+          </a:p>
+        </p:txBody>
+      </p:sp>
+      <p:sp>
+        <p:nvSpPr>
+          <p:cNvPr id="18" name="TextBox 17"/>
+          <p:cNvSpPr txBox="1"/>
+          <p:nvPr/>
+        </p:nvSpPr>
+        <p:spPr>
+          <a:xfrm>
+            <a:off x="1645920" y="5074920"/>
+            <a:ext cx="9601200" cy="320040"/>
+          </a:xfrm>
+          <a:prstGeom prst="rect">
+            <a:avLst/>
+          </a:prstGeom>
+          <a:noFill/>
+        </p:spPr>
+        <p:txBody>
+          <a:bodyPr wrap="square">
+            <a:spAutoFit/>
+          </a:bodyPr>
+          <a:lstStyle/>
+          <a:p>
+            <a:pPr algn="l"/>
+            <a:r>
+              <a:rPr sz="1600" b="1">
+                <a:solidFill>
+                  <a:srgbClr val="12161C"/>
+                </a:solidFill>
+                <a:latin typeface="Noto Serif"/>
+              </a:rPr>
+              <a:t>Token / latency budget?</a:t>
+            </a:r>
+          </a:p>
+        </p:txBody>
+      </p:sp>
+      <p:sp>
+        <p:nvSpPr>
+          <p:cNvPr id="19" name="TextBox 18"/>
+          <p:cNvSpPr txBox="1"/>
+          <p:nvPr/>
+        </p:nvSpPr>
+        <p:spPr>
+          <a:xfrm>
+            <a:off x="1645920" y="5422392"/>
+            <a:ext cx="9601200" cy="320040"/>
+          </a:xfrm>
+          <a:prstGeom prst="rect">
+            <a:avLst/>
+          </a:prstGeom>
+          <a:noFill/>
+        </p:spPr>
+        <p:txBody>
+          <a:bodyPr wrap="square">
+            <a:spAutoFit/>
+          </a:bodyPr>
+          <a:lstStyle/>
+          <a:p>
+            <a:pPr algn="l"/>
+            <a:r>
+              <a:rPr sz="1300" b="0">
+                <a:solidFill>
+                  <a:srgbClr val="6A665E"/>
+                </a:solidFill>
+                <a:latin typeface="Inter"/>
+              </a:rPr>
+              <a:t>Freeze path vs always-on — what $/ %gain is allowed?</a:t>
+            </a:r>
+          </a:p>
+        </p:txBody>
+      </p:sp>
+      <p:sp>
+        <p:nvSpPr>
+          <p:cNvPr id="20" name="TextBox 19"/>
+          <p:cNvSpPr txBox="1"/>
+          <p:nvPr/>
+        </p:nvSpPr>
+        <p:spPr>
+          <a:xfrm>
+            <a:off x="548640" y="6492240"/>
+            <a:ext cx="7315200" cy="228600"/>
+          </a:xfrm>
+          <a:prstGeom prst="rect">
+            <a:avLst/>
+          </a:prstGeom>
+          <a:noFill/>
+        </p:spPr>
+        <p:txBody>
+          <a:bodyPr wrap="square">
+            <a:spAutoFit/>
+          </a:bodyPr>
+          <a:lstStyle/>
+          <a:p>
+            <a:pPr algn="l"/>
+            <a:r>
+              <a:rPr sz="1000" b="0">
+                <a:solidFill>
+                  <a:srgbClr val="6A665E"/>
+                </a:solidFill>
+                <a:latin typeface="Inter"/>
+              </a:rPr>
+              <a:t>Next-Gen AI Compiler Survey</a:t>
+            </a:r>
+          </a:p>
+        </p:txBody>
+      </p:sp>
+      <p:sp>
+        <p:nvSpPr>
+          <p:cNvPr id="21" name="TextBox 20"/>
+          <p:cNvSpPr txBox="1"/>
+          <p:nvPr/>
+        </p:nvSpPr>
+        <p:spPr>
+          <a:xfrm>
+            <a:off x="10241280" y="6492240"/>
+            <a:ext cx="1371600" cy="228600"/>
+          </a:xfrm>
+          <a:prstGeom prst="rect">
+            <a:avLst/>
+          </a:prstGeom>
+          <a:noFill/>
+        </p:spPr>
+        <p:txBody>
+          <a:bodyPr wrap="square">
+            <a:spAutoFit/>
+          </a:bodyPr>
+          <a:lstStyle/>
+          <a:p>
+            <a:pPr algn="r"/>
+            <a:r>
+              <a:rPr sz="1000" b="0">
+                <a:solidFill>
+                  <a:srgbClr val="6A665E"/>
+                </a:solidFill>
+                <a:latin typeface="Inter"/>
+              </a:rPr>
+              <a:t>15 / 16</a:t>
+            </a:r>
+          </a:p>
+        </p:txBody>
+      </p:sp>
+    </p:spTree>
+  </p:cSld>
+  <p:clrMapOvr>
+    <a:masterClrMapping/>
+  </p:clrMapOvr>
+</p:sld>
+</file>
+
+<file path=ppt/slides/slide16.xml><?xml version="1.0" encoding="utf-8"?>
+<p:sld xmlns:a="http://schemas.openxmlformats.org/drawingml/2006/main" xmlns:p="http://schemas.openxmlformats.org/presentationml/2006/main" xmlns:r="http://schemas.openxmlformats.org/officeDocument/2006/relationships">
+  <p:cSld>
+    <p:spTree>
+      <p:nvGrpSpPr>
+        <p:cNvPr id="1" name=""/>
+        <p:cNvGrpSpPr/>
+        <p:nvPr/>
+      </p:nvGrpSpPr>
+      <p:grpSpPr/>
+      <p:sp>
+        <p:nvSpPr>
+          <p:cNvPr id="2" name="Rectangle 1"/>
+          <p:cNvSpPr/>
+          <p:nvPr/>
+        </p:nvSpPr>
+        <p:spPr>
+          <a:xfrm>
+            <a:off x="0" y="0"/>
+            <a:ext cx="12191695" cy="6858000"/>
+          </a:xfrm>
+          <a:prstGeom prst="rect">
+            <a:avLst/>
+          </a:prstGeom>
+          <a:solidFill>
+            <a:srgbClr val="F7F5F1"/>
+          </a:solidFill>
+          <a:ln>
+            <a:noFill/>
+          </a:ln>
+        </p:spPr>
+        <p:style>
+          <a:lnRef idx="1">
+            <a:schemeClr val="accent1"/>
+          </a:lnRef>
+          <a:fillRef idx="3">
+            <a:schemeClr val="accent1"/>
+          </a:fillRef>
+          <a:effectRef idx="2">
+            <a:schemeClr val="accent1"/>
+          </a:effectRef>
+          <a:fontRef idx="minor">
+            <a:schemeClr val="lt1"/>
+          </a:fontRef>
+        </p:style>
+        <p:txBody>
+          <a:bodyPr rtlCol="0" anchor="ctr"/>
+          <a:lstStyle/>
+          <a:p>
+            <a:pPr algn="ctr"/>
+          </a:p>
+        </p:txBody>
+      </p:sp>
+      <p:sp>
+        <p:nvSpPr>
           <p:cNvPr id="3" name="Rectangle 2"/>
           <p:cNvSpPr/>
           <p:nvPr/>
@@ -7244,7 +8519,7 @@
         </p:nvSpPr>
         <p:spPr>
           <a:xfrm>
-            <a:off x="822960" y="1645920"/>
+            <a:off x="822960" y="1463040"/>
             <a:ext cx="10058400" cy="365760"/>
           </a:xfrm>
           <a:prstGeom prst="rect">
@@ -7279,7 +8554,7 @@
         </p:nvSpPr>
         <p:spPr>
           <a:xfrm>
-            <a:off x="822960" y="2103120"/>
+            <a:off x="822960" y="1920240"/>
             <a:ext cx="10515600" cy="1097280"/>
           </a:xfrm>
           <a:prstGeom prst="rect">
@@ -7316,8 +8591,8 @@
         </p:nvSpPr>
         <p:spPr>
           <a:xfrm>
-            <a:off x="822960" y="3931920"/>
-            <a:ext cx="10058400" cy="1645920"/>
+            <a:off x="822960" y="3657600"/>
+            <a:ext cx="10058400" cy="1828800"/>
           </a:xfrm>
           <a:prstGeom prst="rect">
             <a:avLst/>
@@ -7377,6 +8652,22 @@
               <a:t>Signal → Tier A + CONFLICTS settlement watches</a:t>
             </a:r>
           </a:p>
+          <a:p>
+            <a:pPr>
+              <a:spcAft>
+                <a:spcPts val="1000"/>
+              </a:spcAft>
+            </a:pPr>
+            <a:r>
+              <a:rPr sz="1600" b="0">
+                <a:solidFill>
+                  <a:srgbClr val="C8C3BA"/>
+                </a:solidFill>
+                <a:latin typeface="Inter"/>
+              </a:rPr>
+              <a:t>Commercial → §5.7 P1–P23 · freeze artifacts · budget tokens</a:t>
+            </a:r>
+          </a:p>
         </p:txBody>
       </p:sp>
       <p:sp>
@@ -7409,7 +8700,7 @@
                 </a:solidFill>
                 <a:latin typeface="Inter"/>
               </a:rPr>
-              <a:t>Rebuild:  python3 publish/build_pptx.py</a:t>
+              <a:t>Rebuild:  python3 publish/build_pptx.py &amp;&amp; python3 publish/build_visual.py</a:t>
             </a:r>
           </a:p>
         </p:txBody>
@@ -7979,7 +9270,7 @@
                 </a:solidFill>
                 <a:latin typeface="Inter"/>
               </a:rPr>
-              <a:t>2 / 15</a:t>
+              <a:t>2 / 16</a:t>
             </a:r>
           </a:p>
         </p:txBody>
@@ -8721,7 +10012,7 @@
                 </a:solidFill>
                 <a:latin typeface="Inter"/>
               </a:rPr>
-              <a:t>3 / 15</a:t>
+              <a:t>3 / 16</a:t>
             </a:r>
           </a:p>
         </p:txBody>
@@ -9462,7 +10753,7 @@
                 </a:solidFill>
                 <a:latin typeface="Inter"/>
               </a:rPr>
-              <a:t>4 / 15</a:t>
+              <a:t>4 / 16</a:t>
             </a:r>
           </a:p>
         </p:txBody>
@@ -10699,7 +11990,7 @@
                 </a:solidFill>
                 <a:latin typeface="Inter"/>
               </a:rPr>
-              <a:t>5 / 15</a:t>
+              <a:t>5 / 16</a:t>
             </a:r>
           </a:p>
         </p:txBody>
@@ -11702,7 +12993,7 @@
                 </a:solidFill>
                 <a:latin typeface="Inter"/>
               </a:rPr>
-              <a:t>6 / 15</a:t>
+              <a:t>6 / 16</a:t>
             </a:r>
           </a:p>
         </p:txBody>
@@ -12629,7 +13920,7 @@
                 </a:solidFill>
                 <a:latin typeface="Inter"/>
               </a:rPr>
-              <a:t>7 / 15</a:t>
+              <a:t>7 / 16</a:t>
             </a:r>
           </a:p>
         </p:txBody>
@@ -14078,7 +15369,7 @@
                 </a:solidFill>
                 <a:latin typeface="Inter"/>
               </a:rPr>
-              <a:t>8 / 15</a:t>
+              <a:t>8 / 16</a:t>
             </a:r>
           </a:p>
         </p:txBody>
@@ -15397,7 +16688,7 @@
                 </a:solidFill>
                 <a:latin typeface="Inter"/>
               </a:rPr>
-              <a:t>9 / 15</a:t>
+              <a:t>9 / 16</a:t>
             </a:r>
           </a:p>
         </p:txBody>
